--- a/examples/ppt/video.pptx
+++ b/examples/ppt/video.pptx
@@ -5,10 +5,10 @@
     <p:sldMasterId xmlns:r="http://schemas.openxmlformats.org/officeDocument/2006/relationships" id="2147483648" r:id="rId1"/>
   </p:sldMasterIdLst>
   <p:sldIdLst>
-    <p:sldId id="256" r:id="Rfdc5e14e26374893"/>
-    <p:sldId id="257" r:id="R10974a8591884ca0"/>
-    <p:sldId id="258" r:id="R07bd9ce9622b4247"/>
-    <p:sldId id="259" r:id="R155c3afb867b46ec"/>
+    <p:sldId id="256" r:id="Re33f3ebed08b4838"/>
+    <p:sldId id="257" r:id="Ra07b65c8e72e4566"/>
+    <p:sldId id="258" r:id="R0a66f9938b3f4b26"/>
+    <p:sldId id="259" r:id="R8cd759eadf884b91"/>
   </p:sldIdLst>
   <p:sldSz cx="12192000" cy="6858000"/>
   <p:notesSz cx="6858000" cy="9144000"/>
@@ -283,7 +283,7 @@
 </file>
 
 <file path=ppt/slideMasters/slideMaster1.xml><?xml version="1.0" encoding="utf-8"?>
-<p:sldMaster xmlns:p="http://schemas.openxmlformats.org/presentationml/2006/main">
+<p:sldMaster xmlns:r="http://schemas.openxmlformats.org/officeDocument/2006/relationships" xmlns:p="http://schemas.openxmlformats.org/presentationml/2006/main">
   <p:cSld>
     <p:spTree>
       <p:nvGrpSpPr>
@@ -585,7 +585,7 @@
         <p:spPr>
           <a:xfrm xmlns:a="http://schemas.openxmlformats.org/drawingml/2006/main">
             <a:off x="838200" y="365125"/>
-            <a:ext cx="10515600" cy="1325563"/>
+            <a:ext cx="10515600" cy="1320800"/>
           </a:xfrm>
         </p:spPr>
         <p:txBody>
@@ -612,16 +612,16 @@
             <a:picLocks xmlns:a="http://schemas.openxmlformats.org/drawingml/2006/main" noChangeAspect="1"/>
           </p:cNvPicPr>
           <p:nvPr>
-            <a:videoFile xmlns:r="http://schemas.openxmlformats.org/officeDocument/2006/relationships" xmlns:a="http://schemas.openxmlformats.org/drawingml/2006/main" r:link="R8f5c5e2a0cdc49bd"/>
+            <a:videoFile xmlns:r="http://schemas.openxmlformats.org/officeDocument/2006/relationships" xmlns:a="http://schemas.openxmlformats.org/drawingml/2006/main" r:link="R36354840be6b4356"/>
             <p:extLst>
               <p:ext uri="{DAA4B4D4-6D71-4841-9C94-3DE7FCFB9230}">
-                <p14:media xmlns:p14="http://schemas.microsoft.com/office/powerpoint/2010/main" xmlns:r="http://schemas.openxmlformats.org/officeDocument/2006/relationships" r:embed="R3dab9d672e854ddd"/>
+                <p14:media xmlns:p14="http://schemas.microsoft.com/office/powerpoint/2010/main" xmlns:r="http://schemas.openxmlformats.org/officeDocument/2006/relationships" r:embed="R2352c9964fb749ca"/>
               </p:ext>
             </p:extLst>
           </p:nvPr>
         </p:nvPicPr>
         <p:blipFill>
-          <a:blip xmlns:r="http://schemas.openxmlformats.org/officeDocument/2006/relationships" xmlns:a="http://schemas.openxmlformats.org/drawingml/2006/main" r:embed="R7f846a300aea48a3"/>
+          <a:blip xmlns:r="http://schemas.openxmlformats.org/officeDocument/2006/relationships" xmlns:a="http://schemas.openxmlformats.org/drawingml/2006/main" r:embed="R715a2c2641324572"/>
           <a:stretch xmlns:a="http://schemas.openxmlformats.org/drawingml/2006/main">
             <a:fillRect/>
           </a:stretch>
@@ -746,7 +746,7 @@
         <p:spPr>
           <a:xfrm xmlns:a="http://schemas.openxmlformats.org/drawingml/2006/main">
             <a:off x="838200" y="365125"/>
-            <a:ext cx="10515600" cy="1325563"/>
+            <a:ext cx="10515600" cy="1320800"/>
           </a:xfrm>
         </p:spPr>
         <p:txBody>
@@ -852,7 +852,7 @@
         </p:xfrm>
         <a:graphic xmlns:a="http://schemas.openxmlformats.org/drawingml/2006/main">
           <a:graphicData uri="http://schemas.openxmlformats.org/drawingml/2006/chart">
-            <c:chart xmlns:r="http://schemas.openxmlformats.org/officeDocument/2006/relationships" xmlns:c="http://schemas.openxmlformats.org/drawingml/2006/chart" r:id="Rb766ccd613684801"/>
+            <c:chart xmlns:r="http://schemas.openxmlformats.org/officeDocument/2006/relationships" xmlns:c="http://schemas.openxmlformats.org/drawingml/2006/chart" r:id="R7b6cb47d2c884dea"/>
           </a:graphicData>
         </a:graphic>
       </p:graphicFrame>
@@ -889,7 +889,7 @@
         <p:spPr>
           <a:xfrm xmlns:a="http://schemas.openxmlformats.org/drawingml/2006/main">
             <a:off x="838200" y="365125"/>
-            <a:ext cx="10515600" cy="1325563"/>
+            <a:ext cx="10515600" cy="1320800"/>
           </a:xfrm>
         </p:spPr>
         <p:txBody>
@@ -916,10 +916,10 @@
             <a:picLocks xmlns:a="http://schemas.openxmlformats.org/drawingml/2006/main" noChangeAspect="1"/>
           </p:cNvPicPr>
           <p:nvPr>
-            <a:videoFile xmlns:r="http://schemas.openxmlformats.org/officeDocument/2006/relationships" xmlns:a="http://schemas.openxmlformats.org/drawingml/2006/main" r:link="Rf9844b7a2f5241d9"/>
+            <a:videoFile xmlns:r="http://schemas.openxmlformats.org/officeDocument/2006/relationships" xmlns:a="http://schemas.openxmlformats.org/drawingml/2006/main" r:link="R29693f280eb84dd1"/>
             <p:extLst>
               <p:ext uri="{DAA4B4D4-6D71-4841-9C94-3DE7FCFB9230}">
-                <p14:media xmlns:p14="http://schemas.microsoft.com/office/powerpoint/2010/main" xmlns:r="http://schemas.openxmlformats.org/officeDocument/2006/relationships" r:embed="R95a98b55d7684009">
+                <p14:media xmlns:p14="http://schemas.microsoft.com/office/powerpoint/2010/main" xmlns:r="http://schemas.openxmlformats.org/officeDocument/2006/relationships" r:embed="Rbe080a84e670430d">
                   <p14:trim st="0" end="2"/>
                 </p14:media>
               </p:ext>
@@ -927,7 +927,7 @@
           </p:nvPr>
         </p:nvPicPr>
         <p:blipFill>
-          <a:blip xmlns:r="http://schemas.openxmlformats.org/officeDocument/2006/relationships" xmlns:a="http://schemas.openxmlformats.org/drawingml/2006/main" r:embed="Rc127fe4893a34f63"/>
+          <a:blip xmlns:r="http://schemas.openxmlformats.org/officeDocument/2006/relationships" xmlns:a="http://schemas.openxmlformats.org/drawingml/2006/main" r:embed="R041ac181fc3d4209"/>
           <a:stretch xmlns:a="http://schemas.openxmlformats.org/drawingml/2006/main">
             <a:fillRect/>
           </a:stretch>
